--- a/KOMAX_deck_SIMPLE.pptx
+++ b/KOMAX_deck_SIMPLE.pptx
@@ -538,7 +538,7 @@
                 <a:latin typeface="Inter"/>
               </a:rPr>
               <a:t>[01] Cover  (45 s)
-Bonjour à tous. Je m'appelle **Moutia Bensaad**. Je suis étudiant en Mastère 2, Systèmes Embarqués et Mobile, à l'ISET Nabeul. J'ai fait mon stage à ICEM Nabeul. Mon encadrant académique est **Monsieur Imed Hidri**. Mon encadrant société est **Monsieur Yassine Hammami**. Mon projet parle de *maintenance prédictive intelligente*. Il concerne deux machines Komax : la **Alpha 433 H** et la **Gamma 333 PC**. L'idée est simple. On installe des capteurs sur les machines. On envoie les données à une carte Raspberry Pi. On entraîne un modèle qui prédit les pannes. On montre les alertes sur une application web et une application mobile. Voici maintenant le plan.</a:t>
+Bonjour à tous. Je m'appelle **Moutia Bensaad**. Je suis étudiant en Mastère 2, Systèmes Embarqués et Mobile, à l'ISET Nabeul. J'ai fait mon stage à ICEM Nabeul. Mon encadrant académique est **Monsieur Imed Hidri**. Mon encadrant société est **Monsieur Yassine Hammami**. Mon projet parle de *maintenance prédictive intelligente*. Il concerne 2 machines Komax : la **Alpha 433 H** et la **Gamma 333 PC**. L'idée est simple. On installe des capteurs sur les machines. On envoie les données à une carte Raspberry Pi. On entraîne un modèle qui prédit les pannes. On montre les alertes sur une application web et une application mobile. Voici maintenant le plan.</a:t>
             </a:r>
           </a:p>
         </p:txBody>
@@ -611,8 +611,8 @@
               <a:rPr sz="1200">
                 <a:latin typeface="Inter"/>
               </a:rPr>
-              <a:t>[10] Capteurs et instrumentation  (55 s)
-On a choisi **quatre types de capteurs**. Le **DS18B20** mesure la température. Il est placé sur le moteur, pour détecter la chaleur des roulements. Le **MPU-6050** mesure les vibrations. Il est placé près de la tête de coupe. Il détecte l'usure des courroies. La **caméra thermique AMG8833** donne une image de chaleur. Elle est placée au-dessus de la machine. Elle voit les points chauds. Enfin, la **pince SCT-013** mesure le courant électrique de l'armoire. Elle utilise un convertisseur ADS1015. Ces quatre capteurs couvrent les zones de panne les plus importantes.</a:t>
+              <a:t>[10] DHT22 · caractéristiques  (35 s)
+Le **premier capteur** est le **DHT22**. C'est une petite sonde de **température**. Ses caractéristiques : elle mesure de **-40 à +80 degrés**, avec une précision de **plus ou moins un demi degré**. Elle donne aussi l'humidité. Elle coûte environ **3 euros**. Pourquoi ce choix ? Un moteur **chauffe avant de tomber en panne**. Ce capteur détecte ce signal très tôt. Il est simple, robuste, très peu cher. C'est le meilleur compromis pour surveiller un moteur.</a:t>
             </a:r>
           </a:p>
         </p:txBody>
@@ -685,8 +685,8 @@
               <a:rPr sz="1200">
                 <a:latin typeface="Inter"/>
               </a:rPr>
-              <a:t>[11] Stack technique  (35 s)
-On a utilisé **trois blocs** logiciels. Pour le **backend** : Node.js, Express, MongoDB, et JWT pour l'authentification. Pour l'**IA** : Python, FastAPI, et scikit-learn. Nos modèles sont Random Forest et XGBoost. Pour le **frontend** : React pour le web, Flutter pour le mobile. On utilise aussi Firebase pour les notifications push. Le backend et l'IA sont déployés sur Render.</a:t>
+              <a:t>[11] MPU-6050 · caractéristiques  (35 s)
+Le **deuxième capteur** est le **MPU-6050**. Il mesure les **vibrations** sur **3 axes**. Sa plage va de **plus ou moins 2 g à 16 g**. Il a aussi un gyroscope. Il communique en **I2C**. Pourquoi ce capteur ? Parce qu'il est très **utilisé et bien documenté**. Les 3 axes donnent une signature de vibration riche. Ça permet de **distinguer** une **courroie détendue** d'un **roulement usé**. Ce sont 2 causes de panne différentes.</a:t>
             </a:r>
           </a:p>
         </p:txBody>
@@ -759,8 +759,8 @@
               <a:rPr sz="1200">
                 <a:latin typeface="Inter"/>
               </a:rPr>
-              <a:t>[12] Section 3 · Conception  (5 s)
-Voici la conception.</a:t>
+              <a:t>[12] AMG8833 · caractéristiques  (40 s)
+Le **troisième capteur** est l'**AMG8833**. C'est une **caméra thermique**. Elle donne une image de chaleur en **8 par 8 pixels**. Sa plage va de **-20 à +80 degrés**. Son champ de vue est de **60 degrés**. Elle communique en **I2C**. Pourquoi ce capteur ? Parce qu'elle donne une **vision globale** de la zone chaude, **sans contact** avec la machine. La résolution est faible, mais elle suffit pour repérer un **point chaud**. C'est une alternative à une caméra FLIR à **500 euros**. L'AMG8833 coûte **30 euros**.</a:t>
             </a:r>
           </a:p>
         </p:txBody>
@@ -833,8 +833,8 @@
               <a:rPr sz="1200">
                 <a:latin typeface="Inter"/>
               </a:rPr>
-              <a:t>[13] Architecture cinq couches  (50 s)
-L'architecture a **cinq couches**. **Un** : la couche perception. Ce sont les capteurs physiques. **Deux** : la couche acquisition. C'est la Raspberry Pi qui lit les capteurs. **Trois** : la couche transport. Les données passent par HTTPS vers le serveur. **Quatre** : la couche traitement. Le backend et l'IA analysent les données. **Cinq** : la couche application. Le web et le mobile montrent les résultats. Chaque couche a son rôle. On peut changer une couche sans casser les autres.</a:t>
+              <a:t>[13] SCT-013 · caractéristiques  (40 s)
+Le **quatrième capteur** est la **pince SCT-013**. Elle mesure le **courant électrique**. C'est une pince **non-invasive** : on ne coupe pas le câble, on la clippe simplement autour. On utilise la variante **SCT-013-000**. Elle mesure jusqu'à **100 ampères**. Elle donne un petit courant, de **0 à 50 milliampères**. Une **résistance de 33 ohms** le transforme en tension. On le lit avec un petit convertisseur, le **ADS1015**, en 12 bits. Pourquoi ce choix ? Parce que le **courant total** de l'armoire reflète l'état de tous les moteurs. Un moteur qui force **tire plus de courant**. Cette signature électrique complète bien les autres capteurs. Ces 4 types de capteurs s'appuient sur 3 blocs logiciels.</a:t>
             </a:r>
           </a:p>
         </p:txBody>
@@ -907,8 +907,8 @@
               <a:rPr sz="1200">
                 <a:latin typeface="Inter"/>
               </a:rPr>
-              <a:t>[14] Raspberry Pi terrain  (40 s)
-La Raspberry Pi est notre carte terrain. Elle lit les quatre capteurs. Les trois capteurs I2C sont sur le même bus. Le DS18B20 utilise un fil séparé. Un script Python lit chaque capteur. Il calcule les valeurs importantes. Puis il envoie un fichier **JSON** toutes les cinq secondes. Un service Linux redémarre le script si besoin. Si le réseau tombe, les données sont gardées en local. Elles sont renvoyées après.</a:t>
+              <a:t>[14] Stack technique  (35 s)
+On a utilisé **3 blocs** logiciels. Pour le **backend** : Node.js, Express, MongoDB, et JWT pour l'authentification. Pour l'**IA** : Python, FastAPI, et scikit-learn. Nos modèles sont Random Forest et XGBoost. Pour le **frontend** : React pour le web, Flutter pour le mobile. On utilise aussi Firebase pour les notifications push. Tout est déployé sur le serveur interne d'ICEM, pas sur le cloud. Voyons comment ces briques s'organisent dans l'architecture.</a:t>
             </a:r>
           </a:p>
         </p:txBody>
@@ -981,8 +981,8 @@
               <a:rPr sz="1200">
                 <a:latin typeface="Inter"/>
               </a:rPr>
-              <a:t>[15] Modélisation UML  (45 s)
-On a fait **deux diagrammes** UML principaux. Le **diagramme de cas d'utilisation**. Il montre six acteurs : responsable maintenance, chef de ligne, technicien, et trois systèmes : IoT, IA, et notifications. Il montre aussi les fonctions principales. Le **diagramme de classes** montre cinq entités : machine, utilisateur, intervention, alerte, capteur. Pour la maintenance, on a utilisé un seul type avec un champ *type* : préventif, correctif, ou prédictif. C'est plus simple pour les requêtes.</a:t>
+              <a:t>[15] Section 3 · Conception  (5 s)
+Voici la conception.</a:t>
             </a:r>
           </a:p>
         </p:txBody>
@@ -1055,8 +1055,8 @@
               <a:rPr sz="1200">
                 <a:latin typeface="Inter"/>
               </a:rPr>
-              <a:t>[16] Pipeline temps réel  (45 s)
-Le pipeline temps réel a **cinq étapes**. **Un** : la Raspberry Pi envoie un JSON toutes les cinq secondes. **Deux** : le backend valide le JSON et l'enregistre dans MongoDB. **Trois** : le backend appelle le microservice IA. **Quatre** : FastAPI répond avec la probabilité de panne et la cause. **Cinq** : si la probabilité est plus grande que **80%**, une maintenance prédictive est créée. Une notification est envoyée au technicien. Tout ça prend moins d'une seconde.</a:t>
+              <a:t>[16] Architecture 5 couches  (50 s)
+L'architecture a **5 couches**. **1** : la couche perception. Ce sont les 5 capteurs sur la machine. **2** : la couche edge. C'est la Raspberry Pi. Elle lit les capteurs et envoie les mesures au serveur en HTTP, toutes les 60 secondes. **3** : la couche backend. C'est le serveur Node.js avec la base MongoDB. Il garde toutes les données. **4** : la couche intelligence. C'est un microservice FastAPI avec 2 modules : la prédiction et la fiabilité. **5** : la couche application. Le web et le mobile montrent les résultats et les alertes. Chaque couche a son rôle. On peut changer une couche sans casser les autres. Zoom d'abord sur la Raspberry Pi, la carte terrain.</a:t>
             </a:r>
           </a:p>
         </p:txBody>
@@ -1129,8 +1129,8 @@
               <a:rPr sz="1200">
                 <a:latin typeface="Inter"/>
               </a:rPr>
-              <a:t>[17] Section 4 · Développement  (5 s)
-Passons au développement.</a:t>
+              <a:t>[17] Raspberry Pi terrain  (40 s)
+La Raspberry Pi est notre carte terrain. Elle lit les **5 capteurs**. 3 composants sont sur le même bus I2C : le MPU-6050, l'AMG8833, et le convertisseur de la pince SCT-013. Les 2 DHT22 utilisent 2 broches GPIO séparées. Un script Python lit les capteurs toutes les **60 secondes**. Puis il envoie les mesures en **JSON** au serveur. Si l'envoi échoue, il réessaie automatiquement. Un service Linux redémarre le script si besoin. Voyons maintenant où chaque capteur est placé sur la machine.</a:t>
             </a:r>
           </a:p>
         </p:txBody>
@@ -1203,8 +1203,8 @@
               <a:rPr sz="1200">
                 <a:latin typeface="Inter"/>
               </a:rPr>
-              <a:t>[18] Backend Express + MongoDB  (45 s)
-Le backend est une API REST. Il a **huit ressources** principales : machines, utilisateurs, interventions, alertes, capteurs, maintenances, checklists, et analyses de fiabilité. L'authentification utilise **JWT**. Il y a **trois rôles** : responsable, chef de ligne, et technicien. Un middleware contrôle les accès. Il utilise un seul fichier de permissions. Le même fichier protège aussi l'interface. Un script *seed* initialise la base avec des données de démonstration.</a:t>
+              <a:t>[18] DHT22 · emplacement  (30 s)
+Voici **où on a placé le DHT22**. On le voit ici, **fixé sur le corps du servomoteur**. Il est en contact direct avec le métal. On a mis **un deuxième DHT22** dans l'**armoire électrique**. Il donne la température ambiante. Pourquoi cet endroit ? Parce que **le moteur chauffe en premier** quand un roulement fatigue. Un contact direct donne une lecture **rapide et fiable**.</a:t>
             </a:r>
           </a:p>
         </p:txBody>
@@ -1277,8 +1277,8 @@
               <a:rPr sz="1200">
                 <a:latin typeface="Inter"/>
               </a:rPr>
-              <a:t>[19] Microservice IA FastAPI  (45 s)
-Le microservice IA est en Python, avec FastAPI. Il a **quatre endpoints** : type de panne, cause probable, probabilité, et prévision de fiabilité. On a deux modèles : **Random Forest** pour les causes physiques, et **XGBoost** pour la probabilité. Un troisième modèle, une régression linéaire, calcule la fiabilité future. Le backend appelle ce microservice à chaque nouvelle mesure. Ça n'arrête pas la Raspberry Pi.</a:t>
+              <a:t>[19] MPU-6050 · emplacement  (30 s)
+Voici **où on a placé le MPU-6050**. On le voit ici, **collé sur le carter métallique**. Il est très près de la **tête de coupe**. Pourquoi cet endroit ? Parce que le signal de vibration **se perd très vite** dans l'air ou dans une gaine. Un contact direct donne un **signal propre**. On capte ainsi la **vraie signature** de la mécanique.</a:t>
             </a:r>
           </a:p>
         </p:txBody>
@@ -1352,7 +1352,7 @@
                 <a:latin typeface="Inter"/>
               </a:rPr>
               <a:t>[02] Plan de la présentation  (30 s)
-La présentation a **six parties**. D'abord, l'introduction et le contexte. Ensuite, l'état de l'art. Puis la conception. Après, le développement, qui est la partie principale. Puis une démonstration en direct. Et à la fin, les résultats et les perspectives.</a:t>
+La présentation a **6 parties**. D'abord, l'introduction et le contexte. Ensuite, l'état de l'art. Puis la conception. Après, le développement, qui est la partie principale. Puis une démonstration en direct. Et à la fin, les résultats et les perspectives.</a:t>
             </a:r>
           </a:p>
         </p:txBody>
@@ -1425,8 +1425,8 @@
               <a:rPr sz="1200">
                 <a:latin typeface="Inter"/>
               </a:rPr>
-              <a:t>[20] Dataset d'entraînement  (50 s)
-On n'a pas installé les capteurs physiquement. Alors on a créé un **dataset synthétique**. Mais il est basé sur des données réelles. On a généré **environ soixante-cinq mille lectures**. On a utilisé les fiches techniques Komax, les manuels moteur, et surtout **l'historique de mille pannes ICEM**. Chaque type de panne a sa signature physique. Par exemple : plus quatre à huit degrés pour l'usure d'un roulement. Ou six ampères de surcharge pour une panne multi-moteurs. Ce dataset peut être réutilisé quand les capteurs seront installés.</a:t>
+              <a:t>[20] AMG8833 · emplacement  (35 s)
+Voici **où on a placé l'AMG8833**. On la voit ici, **fixée en hauteur** sur le châssis de la machine. Elle est à environ **50 centimètres**. Elle regarde vers le bas, sur la **tête de coupe** et la **zone Gommino**. Pourquoi cet endroit ? Parce que son champ de **60 degrés** couvre toute la **zone chaude** d'un seul coup. Elle surveille le Gommino et le carter de la tête de coupe. Et elle ne touche **aucune pièce en mouvement**.</a:t>
             </a:r>
           </a:p>
         </p:txBody>
@@ -1499,8 +1499,8 @@
               <a:rPr sz="1200">
                 <a:latin typeface="Inter"/>
               </a:rPr>
-              <a:t>[21] Taxonomie des causes  (45 s)
-Le modèle classe les pannes en **treize causes physiques**, codées C01 à C13. Par exemple : usure moteur, désalignement lame, courroie détendue, contamination, surintensité, échauffement carte, capteur défaillant, obstruction, défaut alimentation, dérive calibration, blocage éjection, défaut communication, et non-signature. Avant, on utilisait des zones. Maintenant, avec les causes, le modèle donne une information plus utile. Il complète le diagnostic humain, il ne le remplace pas.</a:t>
+              <a:t>[21] SCT-013 · emplacement  (30 s)
+Voici **où on a placé la SCT-013**. On la voit ici, la **pince bleue**, clampée autour d'un câble à l'intérieur de l'armoire. Le signal est ramené au **Raspberry Pi** (le paquet essai en bas) par le convertisseur **ADS1015** posé sur la breadboard. Pourquoi cet endroit ? Parce que ce câble porte le **courant tiré par les moteurs**. **Une seule pince** suffit pour voir l'état électrique. La pose se fait **sans arrêter la production**. La couche physique est posée. Passons à la modélisation logicielle.</a:t>
             </a:r>
           </a:p>
         </p:txBody>
@@ -1573,8 +1573,8 @@
               <a:rPr sz="1200">
                 <a:latin typeface="Inter"/>
               </a:rPr>
-              <a:t>[22] Performances F1  (50 s)
-On a testé **deux modèles** sur le même jeu de test. Le **Random Forest** est le modèle de référence. Il a un F1 de **quarante-cinq pour cent**. Il est correct sur les classes fréquentes, mais faible sur les rares. Le **XGBoost** est le modèle final. Il a un F1 de **quatre-vingt-treize pour cent**. Sa précision est plus de **90%** sur onze causes sur treize. XGBoost est meilleur parce qu'il gère mieux les données déséquilibrées. On a aussi utilisé **SMOTE** pour équilibrer les classes rares. Ces résultats valident notre architecture.</a:t>
+              <a:t>[22] Diagramme de cas d'utilisation  (30 s)
+Voici le **diagramme de cas d'utilisation**. Il montre **6 acteurs** et **12 cas d'utilisation**. 3 acteurs humains. Le responsable maintenance gère les machines, les comptes et la maintenance. Le chef de ligne surveille les machines et les alertes. Le technicien reçoit les alertes et gère les interventions. 3 acteurs système. L'IA maintenance analyse les pannes. L'IA fiabilité analyse chaque machine et recommande de la garder ou de la renouveler. L'IoT collecte les données des capteurs. Pour chaque action, l'utilisateur doit d'abord **s'authentifier**. Ces cas d'utilisation s'appuient sur 9 classes.</a:t>
             </a:r>
           </a:p>
         </p:txBody>
@@ -1647,8 +1647,8 @@
               <a:rPr sz="1200">
                 <a:latin typeface="Inter"/>
               </a:rPr>
-              <a:t>[23] Matrice de confusion  (35 s)
-La matrice de confusion du XGBoost a une **diagonale forte**. La plupart des prédictions sont correctes. Les erreurs restantes concernent deux paires proches. **Un** : usure moteur et échauffement carte. Les deux donnent une signature de chaleur. **Deux** : courroie détendue et désalignement lame. Les deux donnent une signature de vibration. Ces confusions sont acceptables. En pratique, l'intervention corrige souvent les deux ensemble.</a:t>
+              <a:t>[23] Diagramme de classes  (30 s)
+Voici le **diagramme de classes**. Il montre **9 classes**. 5 classes pour le métier : utilisateur, ligne, machine, maintenance et alerte. 2 classes pour l'IoT : capteur et Raspberry Pi. 2 classes pour l'IA : analyse des pannes et analyse de fiabilité. Ces classes structurent la base MongoDB. Un choix important : pour la maintenance, on a utilisé **une seule classe** avec un champ *type*. Ce champ a 5 valeurs : préventive, corrective, prédictive, checklist journalière et checklist préventive. C'est plus simple que 5 classes séparées. Ces entités s'enchaînent en temps réel selon un pipeline précis.</a:t>
             </a:r>
           </a:p>
         </p:txBody>
@@ -1721,8 +1721,8 @@
               <a:rPr sz="1200">
                 <a:latin typeface="Inter"/>
               </a:rPr>
-              <a:t>[24] Fonctionnalités web  (45 s)
-L'application web est pour le **responsable maintenance**. Elle a **six modules**. Un tableau de bord avec les indicateurs MTBF et MTTR. Une gestion des machines et de leur historique. Un module d'interventions avec assignation. Un planning préventif dans un calendrier. Un centre d'alertes avec filtres. Un module de fiabilité avec rapport PDF. Tous les modules utilisent le même fichier de permissions du backend.</a:t>
+              <a:t>[24] Pipeline temps réel  (45 s)
+Le pipeline a **5 étapes**. **1** : la Raspberry Pi lit les capteurs toutes les **10 à 60 secondes**. **2** : le backend enregistre la mesure dans MongoDB. **3** : toutes les **5 minutes**, il envoie à l'IA les mesures des **2 dernières heures**. **4** : l'IA répond avec la probabilité de panne et la cause. **5** : à **60 %**, une alerte. À **80 %**, une alerte critique et une intervention prédictive. Le responsable reçoit une notification.</a:t>
             </a:r>
           </a:p>
         </p:txBody>
@@ -1795,8 +1795,8 @@
               <a:rPr sz="1200">
                 <a:latin typeface="Inter"/>
               </a:rPr>
-              <a:t>[25] Web · exemples d'écrans  (40 s)
-Voici quelques écrans. Le **tableau de bord** montre les indicateurs par machine, avec des couleurs. Vert : normal. Orange : dégradé. Rouge : critique. La page **détail machine** montre l'historique, la checklist en cours, et les interventions passées. La page **interventions** a un badge *IA* quand la maintenance est créée automatiquement. Le module **fiabilité** génère un PDF prêt à archiver.</a:t>
+              <a:t>[25] Section 4 · Développement  (5 s)
+Passons au développement.</a:t>
             </a:r>
           </a:p>
         </p:txBody>
@@ -1869,8 +1869,8 @@
               <a:rPr sz="1200">
                 <a:latin typeface="Inter"/>
               </a:rPr>
-              <a:t>[26] Fonctionnalités mobile  (40 s)
-L'application mobile est en **Flutter**. Elle est pour le **technicien** et le **chef de ligne**. Elle a **cinq écrans** principaux. Un tableau de bord simple. La liste des machines. Les interventions en cours, avec photos avant-après. Les alertes en direct, avec Firebase. Et le profil de l'utilisateur. Une règle importante : les photos doivent être prises avec la caméra, pas la galerie. C'est pour garantir la traçabilité.</a:t>
+              <a:t>[26] Backend Express + MongoDB  (45 s)
+Le backend est une API REST, avec Node.js et Express. MongoDB garde **9 collections principales**. Ce sont les mêmes que dans le diagramme de classes. Il y a aussi les checklists et le planning. L'authentification utilise **JWT**. Il y a **3 rôles** : responsable, chef de ligne, et technicien. Côté API, un middleware vérifie le rôle sur chaque route. Côté interface, un seul fichier de permissions cache les pages et les boutons selon le rôle. La Raspberry Pi utilise une clé d'API spéciale. Un script *seed* initialise la base avec des données de démonstration. Toutes les 5 minutes, le backend envoie à l'IA les mesures des 2 dernières heures.</a:t>
             </a:r>
           </a:p>
         </p:txBody>
@@ -1943,8 +1943,8 @@
               <a:rPr sz="1200">
                 <a:latin typeface="Inter"/>
               </a:rPr>
-              <a:t>[27] Mobile · exemples d'écrans  (40 s)
-Voici les écrans mobile. La **liste d'interventions** montre chaque tâche avec sa priorité. Le **détail intervention** permet de saisir un état, de joindre deux photos, et de signer la clôture. Les **alertes** arrivent en direct, avec vibration et son. La **checklist préventive** est présentée en grille. Chaque ligne se verrouille après validation, pour éviter les modifications en même temps.</a:t>
+              <a:t>[27] Microservice IA FastAPI  (45 s)
+Le microservice IA est en Python, avec FastAPI. On a **3 modèles**. Le **Random Forest** dit **pourquoi** : la cause parmi 5. Le **XGBoost** dit **quand** : la probabilité de panne dans les 24 heures. La **régression linéaire** calcule la fiabilité sur 3 mois. Voyons sur quoi on a entraîné ces modèles.</a:t>
             </a:r>
           </a:p>
         </p:txBody>
@@ -2017,8 +2017,8 @@
               <a:rPr sz="1200">
                 <a:latin typeface="Inter"/>
               </a:rPr>
-              <a:t>[28] Analyse de fiabilité  (40 s)
-Le module de fiabilité aide à la décision. Pour chaque machine, il calcule : le nombre de pannes, le temps moyen entre pannes, le taux de disponibilité, et une projection sur trois mois. La projection utilise une **régression linéaire**. Un rapport **PDF** est généré côté serveur. Il est téléchargeable depuis le web et depuis le mobile. La recommandation finale est simple : **conserver**, **surveiller**, ou **remplacer**.</a:t>
+              <a:t>[28] Dataset d'entraînement  (35 s)
+Tout commence avec l'historique ICEM : **1 467 interventions**, surtout en 2022. Seul, il ne suffit pas : le score est **0,15**, car il n'a pas de mesures. Mais il nous dit où mettre les capteurs, les horaires et la durée des arrêts. Avec ça, on a créé **112 680 mesures** : 12 mois, 2 machines, **69 pannes**. Pour tester, on coupe **par semaines**.</a:t>
             </a:r>
           </a:p>
         </p:txBody>
@@ -2091,8 +2091,8 @@
               <a:rPr sz="1200">
                 <a:latin typeface="Inter"/>
               </a:rPr>
-              <a:t>[29] Déploiement  (35 s)
-Le backend et le microservice IA sont sur **Render**. C'est une plateforme cloud gérée. La base MongoDB est sur **MongoDB Atlas**, sur un cluster gratuit en Europe. En local, on utilise PM2 pour superviser. En production, c'est Render qui supervise. Un endpoint */health* permet de vérifier que tout marche. Le mobile est distribué en **APK signé**.</a:t>
+              <a:t>[29] Causes suivies  (30 s)
+Le modèle suit **5 causes**. Ce sont les pannes qu'un capteur peut voir. **Vibration** : usure et courroie. **Chaleur du moteur** : ventilation sale et surcharge. Pour la surcharge, le courant monte aussi. **Chaleur de l'armoire** : ventilateur ou filtre en panne. Les autres pannes, l'IHM Komax les montre déjà.</a:t>
             </a:r>
           </a:p>
         </p:txBody>
@@ -2239,8 +2239,8 @@
               <a:rPr sz="1200">
                 <a:latin typeface="Inter"/>
               </a:rPr>
-              <a:t>[30] Section 5 · Démonstration  (5 s)
-Passons à la démonstration.</a:t>
+              <a:t>[30] Performances Random Forest  (35 s)
+Le Random Forest a **0,85** de F1 et **96 %** de bonnes réponses. La meilleure cause : la surchauffe armoire, **0,95**. La plus difficile : l'usure, **0,67**, car elle monte lentement. Quand le modèle donne une cause, il a presque toujours raison. Voyons les erreurs.</a:t>
             </a:r>
           </a:p>
         </p:txBody>
@@ -2313,8 +2313,8 @@
               <a:rPr sz="1200">
                 <a:latin typeface="Inter"/>
               </a:rPr>
-              <a:t>[31] KPI et résultats  (45 s)
-Voici un résumé chiffré. **Quatre types de capteurs** par machine. **Environ soixante-cinq mille échantillons** d'entraînement. XGBoost à **quatre-vingt-treize pour cent** de F1. Latence bout-en-bout **moins d'une seconde**. **Deux applications**, web et mobile, sur la même API. Un microservice IA autonome. Un rapport de fiabilité en PDF. Les trois objectifs — capteurs, prédiction, interfaces — sont atteints.</a:t>
+              <a:t>[31] Matrice de confusion  (30 s)
+Chaque ligne montre où vont les cas réels d'une cause. Les erreurs sont logiques. Souvent, la panne est lue « Normal » : au début, elle est trop faible. La courroie et l'usure se mélangent un peu : les 2 vibrent. La surcharge et la ventilation aussi : les 2 chauffent le moteur. Passons au XGBoost.</a:t>
             </a:r>
           </a:p>
         </p:txBody>
@@ -2387,8 +2387,8 @@
               <a:rPr sz="1200">
                 <a:latin typeface="Inter"/>
               </a:rPr>
-              <a:t>[32] Perspectives  (40 s)
-On a identifié **trois perspectives**. **Un** : installer les capteurs physiquement, et ré-entraîner le modèle sur les vraies données. **Deux** : étendre le système à d'autres machines du parc ICEM, par exemple les sertisseuses CFA. **Trois** : ajouter une couche de recommandation. Le système ne va pas juste détecter la panne. Il va aussi proposer l'action à faire. À plus long terme, on peut connecter notre système à la GMAO existante.</a:t>
+              <a:t>[32] XGBoost · panne dans 24 h  (30 s)
+Le XGBoost a une **AUC de 0,94**. Le plus important : sur **69 pannes**, les **69** sont annoncées, environ **20 heures** avant. Sur une machine normale, on a à peu près **1 fausse alerte par semaine**. À **60 %**, une alerte. À **80 %**, une intervention prédictive. Ces prédictions arrivent ensuite sur le web.</a:t>
             </a:r>
           </a:p>
         </p:txBody>
@@ -2461,9 +2461,8 @@
               <a:rPr sz="1200">
                 <a:latin typeface="Inter"/>
               </a:rPr>
-              <a:t>[33] Merci  (30 s)
-Je vous remercie pour votre attention. Je remercie aussi **Monsieur Imed Hidri**, mon encadrant académique. Et **Monsieur Yassine Hammami**, mon encadrant société. Merci aussi à toute l'équipe ICEM Nabeul, qui m'a accueilli pendant six mois. Je suis prêt pour répondre à vos questions.
-Réserve 3–5 min de démo live entre Section 5 et KPI selon le temps restant.</a:t>
+              <a:t>[33] Fonctionnalités web  (30 s)
+L'application web sert les **3 profils** : responsable, chef de ligne et technicien. Elle a **6 modules**. Le tableau de bord montre MTBF, MTTR et disponibilité. La page Équipements montre les 13 machines et les capteurs en direct. Dans les interventions, un bouton lance le diagnostic IA. Il y a aussi la maintenance préventive, le suivi journalier, la fiabilité avec rapport PDF, et les alertes. Voici quelques écrans.</a:t>
             </a:r>
           </a:p>
         </p:txBody>
@@ -2537,7 +2536,7 @@
                 <a:latin typeface="Inter"/>
               </a:rPr>
               <a:t>[04] ICEM Nabeul  (40 s)
-ICEM est une filiale du groupe **Coficab**. L'entreprise fabrique des câbles électriques pour l'industrie automobile. L'usine de Nabeul emploie plusieurs centaines de personnes. Chaque jour, elle produit des milliers de câbles. Les machines principales sont les machines **Komax**. Elles coupent et préparent les fils à grande vitesse. Si une machine tombe en panne, toute la ligne s'arrête. C'est pour ça que la maintenance prédictive est importante ici.</a:t>
+ICEM est une filiale du groupe **Coficab**. L'entreprise fabrique des câbles électriques pour l'industrie automobile. L'usine de Nabeul emploie plusieurs centaines de personnes. Chaque jour, elle produit des milliers de câbles. Les machines principales sont les machines **Komax**. Elles coupent et préparent les fils à grande vitesse. Si une machine tombe en panne, toute la ligne s'arrête. C'est pour ça que la maintenance prédictive est importante ici. 2 machines nous intéressent en particulier.</a:t>
             </a:r>
           </a:p>
         </p:txBody>
@@ -2611,7 +2610,7 @@
                 <a:latin typeface="Inter"/>
               </a:rPr>
               <a:t>[05] Machines Alpha 433 H et Gamma 333 PC  (50 s)
-Le projet cible deux machines. La première est la **Komax Alpha 433 H**. C'est une machine d'entrée de gamme. Elle a **quatre postes** et **six moteurs pas-à-pas**. Son cycle a sept étapes. La deuxième est la **Gamma 333 PC**. C'est une machine plus haut de gamme. Elle a une unité de sertissage double. Elle utilise des courroies avec une tension calibrée. Sur les deux machines, on trouve les mêmes zones critiques : la tête de coupe, les courroies, les capteurs et l'armoire électrique. On a analysé **environ mille pannes** dans l'historique ICEM. Ça nous a aidé à choisir ces zones.</a:t>
+Le projet cible 2 machines. La première est la **Komax Alpha 433 H**. C'est une machine d'entrée de gamme. Elle a **4 postes** et **6 moteurs pas-à-pas**. Son cycle a 7 étapes. La deuxième est la **Gamma 333 PC**. C'est une machine plus haut de gamme. Elle a une unité de sertissage double. Elle utilise des courroies avec une tension calibrée. Sur les 2 machines, on trouve les mêmes zones critiques : la tête de coupe, les courroies, les capteurs et l'armoire électrique. On a analysé **1 467 interventions** dans l'historique ICEM sur 5 ans. Ça nous a aidé à choisir ces zones. Mais pourquoi la maintenance actuelle ne suffit pas ?</a:t>
             </a:r>
           </a:p>
         </p:txBody>
@@ -2685,7 +2684,7 @@
                 <a:latin typeface="Inter"/>
               </a:rPr>
               <a:t>[06] Problématique  (45 s)
-Aujourd'hui, la maintenance à ICEM est surtout **corrective**. On répare après la panne. Il y a aussi une maintenance **préventive**. On change des pièces à date fixe. Les deux méthodes ont des limites. La corrective coûte cher, parce que la ligne s'arrête. La préventive gaspille des pièces qui marchent encore. La maintenance **prédictive** est différente. Elle intervient au bon moment, avec les données des capteurs. Mais sans capteurs, c'est impossible. Notre projet apporte ces capteurs, le traitement des données et les interfaces.</a:t>
+Aujourd'hui, la maintenance à ICEM est surtout **corrective**. On répare après la panne. Il y a aussi une maintenance **préventive**. On change des pièces à date fixe. Les 2 méthodes ont des limites. La corrective coûte cher, parce que la ligne s'arrête. La préventive gaspille des pièces qui marchent encore. La maintenance **prédictive** est différente. Elle intervient au bon moment, avec les données des capteurs. Mais sans capteurs, c'est impossible. Notre projet apporte ces capteurs, le traitement des données et les interfaces. On a fixé 3 objectifs clairs.</a:t>
             </a:r>
           </a:p>
         </p:txBody>
@@ -2759,7 +2758,7 @@
                 <a:latin typeface="Inter"/>
               </a:rPr>
               <a:t>[07] Objectifs  (40 s)
-On a fixé **trois objectifs**. **Premier objectif** : installer quatre types de capteurs sur les deux machines. Température, vibration, image thermique, et courant. **Deuxième objectif** : construire toute la chaîne, du capteur jusqu'à la notification. **Troisième objectif** : livrer deux applications. Une application web pour le responsable maintenance. Une application mobile pour le technicien. On a aussi ajouté un module de fiabilité, pour aider aux décisions.</a:t>
+On a fixé **3 objectifs**. **Premier objectif** : installer 4 types de capteurs sur les 2 machines. Température, vibration, image thermique, et courant. **Deuxième objectif** : construire toute la chaîne, du capteur jusqu'à la notification. **Troisième objectif** : livrer 2 applications. Une application web pour le responsable maintenance. Une application mobile pour le technicien. On a aussi ajouté un module de fiabilité, pour aider aux décisions.</a:t>
             </a:r>
           </a:p>
         </p:txBody>
@@ -2907,7 +2906,7 @@
                 <a:latin typeface="Inter"/>
               </a:rPr>
               <a:t>[09] Méthodologie Scrum  (35 s)
-Le projet a duré **six mois**, d'avril à septembre. On a utilisé la méthode **Scrum**. On a fait **six sprints** de trois à quatre semaines. Chaque sprint a livré une partie du projet. Sprint 1 : la modélisation. Sprint 2 : le backend. Sprint 3 : l'IA. Sprint 4 : le web. Sprint 5 : le mobile. Sprint 6 : l'intégration IoT. À la fin de chaque sprint, on a fait une revue pour valider.</a:t>
+Le projet a duré **6 mois**, de mars à août 2026. On a utilisé la méthode **Scrum**. On a fait **6 sprints**. Chaque sprint traite un cas d'utilisation. Sprint 1 : l'authentification et les comptes. Sprint 2 : les machines et le parc. Sprint 3 : la maintenance et les interventions. Sprint 4 : la surveillance IoT — c'est ce sprint qui a livré les capteurs qu'on voit dans les prochaines slides. Sprint 5 : l'IA et les alertes. Sprint 6 : la fiabilité et la recommandation. À la fin de chaque sprint, on a fait une revue avec l'encadreur. On commence par les 4 types de capteurs, un par un.</a:t>
             </a:r>
           </a:p>
         </p:txBody>
